--- a/decks/architect-universal-data-graph-3-hands-on-1-setting-up-udg/source/deck.pptx
+++ b/decks/architect-universal-data-graph-3-hands-on-1-setting-up-udg/source/deck.pptx
@@ -8716,7 +8716,7 @@
                 <a:cs typeface="Courier New"/>
                 <a:sym typeface="Courier New"/>
               </a:rPr>
-              <a:t>git clone https://github.com/jay-deshmukh/example-rest-api-for-udg.git</a:t>
+              <a:t>git clone https://github.com/example-org/example-rest-api-for-udg.git</a:t>
             </a:r>
             <a:endParaRPr sz="1100">
               <a:solidFill>
@@ -11871,7 +11871,7 @@
                 <a:cs typeface="Courier New"/>
                 <a:sym typeface="Courier New"/>
               </a:rPr>
-              <a:t>      "username": "John Doe",</a:t>
+              <a:t>      "username": "User 1",</a:t>
             </a:r>
             <a:endParaRPr sz="1100">
               <a:solidFill>
